--- a/PPTs/Ch8_ARM_Subroutines_Exercises.pptx
+++ b/PPTs/Ch8_ARM_Subroutines_Exercises.pptx
@@ -5298,7 +5298,7 @@
           <a:p>
             <a:r>
               <a:rPr lang="en-US" dirty="0"/>
-              <a:t>Fall 2025</a:t>
+              <a:t>Fall 2026</a:t>
             </a:r>
           </a:p>
         </p:txBody>
@@ -6707,7 +6707,7 @@
             </a:pPr>
             <a:r>
               <a:rPr lang="en-US" dirty="0"/>
-              <a:t>% uint32_t </a:t>
+              <a:t>@ uint32_t </a:t>
             </a:r>
             <a:r>
               <a:rPr lang="en-US" dirty="0" err="1"/>
@@ -6724,7 +6724,7 @@
             </a:pPr>
             <a:r>
               <a:rPr lang="en-US" dirty="0"/>
-              <a:t>% r0 = n, returns r0 = n!</a:t>
+              <a:t>@ r0 = n, returns r0 = n!</a:t>
             </a:r>
           </a:p>
           <a:p>
@@ -6768,7 +6768,7 @@
             </a:r>
             <a:r>
               <a:rPr lang="en-US" dirty="0"/>
-              <a:t>}        % save callee-saved we’ll use and return </a:t>
+              <a:t>}        @ save callee-saved we’ll use and return </a:t>
             </a:r>
             <a:r>
               <a:rPr lang="en-US" dirty="0" err="1"/>
@@ -6782,7 +6782,7 @@
             </a:pPr>
             <a:r>
               <a:rPr lang="en-US" dirty="0"/>
-              <a:t>    MOV    r1, r0          % r1 = n (loop counter)</a:t>
+              <a:t>    MOV    r1, r0          @ r1 = n (loop counter)</a:t>
             </a:r>
           </a:p>
           <a:p>
@@ -6791,7 +6791,7 @@
             </a:pPr>
             <a:r>
               <a:rPr lang="en-US" dirty="0"/>
-              <a:t>    MOV    r0, #1         % r0 = acc = 1</a:t>
+              <a:t>    MOV    r0, #1         @ r0 = acc = 1</a:t>
             </a:r>
           </a:p>
           <a:p>
@@ -6817,7 +6817,7 @@
             </a:r>
             <a:r>
               <a:rPr lang="en-US" dirty="0"/>
-              <a:t>  % if n &lt;= 1, return 1</a:t>
+              <a:t>  @ if n &lt;= 1, return 1</a:t>
             </a:r>
           </a:p>
           <a:p>
@@ -6849,7 +6849,7 @@
             </a:pPr>
             <a:r>
               <a:rPr lang="en-US" dirty="0"/>
-              <a:t>    % TODO</a:t>
+              <a:t>    @ TODO</a:t>
             </a:r>
           </a:p>
           <a:p>
@@ -7123,7 +7123,7 @@
             </a:pPr>
             <a:r>
               <a:rPr lang="en-US" dirty="0"/>
-              <a:t>% uint32_t factorial(uint32_t n);</a:t>
+              <a:t>@ uint32_t factorial(uint32_t n);</a:t>
             </a:r>
           </a:p>
           <a:p>
@@ -7132,7 +7132,7 @@
             </a:pPr>
             <a:r>
               <a:rPr lang="en-US" dirty="0"/>
-              <a:t>% r0: n</a:t>
+              <a:t>@ r0: n</a:t>
             </a:r>
           </a:p>
           <a:p>
@@ -7141,7 +7141,7 @@
             </a:pPr>
             <a:r>
               <a:rPr lang="en-US" dirty="0"/>
-              <a:t>% returns r0: n!</a:t>
+              <a:t>@ returns r0: n!</a:t>
             </a:r>
           </a:p>
           <a:p>
@@ -7165,7 +7165,7 @@
             </a:pPr>
             <a:r>
               <a:rPr lang="en-US" dirty="0"/>
-              <a:t>    CMP     r0, #1            % if (n &lt;= 1) ...</a:t>
+              <a:t>    CMP     r0, #1            @ if (n &lt;= 1) ...</a:t>
             </a:r>
           </a:p>
           <a:p>
@@ -7174,15 +7174,15 @@
             </a:pPr>
             <a:r>
               <a:rPr lang="en-US" dirty="0"/>
-              <a:t>    BLE     </a:t>
+              <a:t>    BLS     base_case</a:t>
             </a:r>
             <a:r>
               <a:rPr lang="en-US" dirty="0" err="1"/>
-              <a:t>base_case</a:t>
+              <a:t/>
             </a:r>
             <a:r>
               <a:rPr lang="en-US" dirty="0"/>
-              <a:t>         %    ... return 1</a:t>
+              <a:t>         @    ... return 1</a:t>
             </a:r>
           </a:p>
           <a:p>
@@ -7205,7 +7205,7 @@
             </a:r>
             <a:r>
               <a:rPr lang="en-US" dirty="0"/>
-              <a:t>}              % save return address for this frame</a:t>
+              <a:t>}              @ save return address for this frame</a:t>
             </a:r>
           </a:p>
           <a:p>
@@ -7214,7 +7214,7 @@
             </a:pPr>
             <a:r>
               <a:rPr lang="en-US" dirty="0"/>
-              <a:t>    PUSH    {r0}              % save current n on stack (we'll need it after the recursive call)</a:t>
+              <a:t>    PUSH    {r0}              @ save current n on stack (we'll need it after the recursive call)</a:t>
             </a:r>
           </a:p>
           <a:p>
@@ -7229,7 +7229,7 @@
             </a:pPr>
             <a:r>
               <a:rPr lang="en-US" dirty="0"/>
-              <a:t>    SUB     r0, r0, #1        % r0 = n - 1 (argument for recursive call)</a:t>
+              <a:t>    SUB     r0, r0, #1        @ r0 = n - 1 (argument for recursive call)</a:t>
             </a:r>
           </a:p>
           <a:p>
@@ -7238,7 +7238,7 @@
             </a:pPr>
             <a:r>
               <a:rPr lang="en-US" dirty="0"/>
-              <a:t>    BL      factorial         % r0 = factorial(n - 1)</a:t>
+              <a:t>    BL      factorial         @ r0 = factorial(n - 1)</a:t>
             </a:r>
           </a:p>
           <a:p>
@@ -7253,7 +7253,7 @@
             </a:pPr>
             <a:r>
               <a:rPr lang="en-US" dirty="0"/>
-              <a:t>    POP     {r1}              % r1 = saved n (restore caller's n)</a:t>
+              <a:t>    POP     {r1}              @ r1 = saved n (restore caller's n)</a:t>
             </a:r>
           </a:p>
           <a:p>
@@ -7262,7 +7262,7 @@
             </a:pPr>
             <a:r>
               <a:rPr lang="en-US" dirty="0"/>
-              <a:t>    MUL     r0, r0, r1        % r0 = factorial(n - 1) * n</a:t>
+              <a:t>    MUL     r0, r0, r1        @ r0 = factorial(n - 1) * n</a:t>
             </a:r>
           </a:p>
           <a:p>
@@ -7285,7 +7285,7 @@
             </a:r>
             <a:r>
               <a:rPr lang="en-US" dirty="0"/>
-              <a:t>}              % restore return address</a:t>
+              <a:t>}              @ restore return address</a:t>
             </a:r>
           </a:p>
           <a:p>
@@ -7302,7 +7302,7 @@
             </a:r>
             <a:r>
               <a:rPr lang="en-US" dirty="0"/>
-              <a:t>                % return with result in r0</a:t>
+              <a:t>                @ return with result in r0</a:t>
             </a:r>
           </a:p>
           <a:p>
@@ -7330,7 +7330,7 @@
             </a:pPr>
             <a:r>
               <a:rPr lang="en-US" dirty="0"/>
-              <a:t>    % TODO</a:t>
+              <a:t>    @ TODO</a:t>
             </a:r>
           </a:p>
         </p:txBody>
@@ -7783,7 +7783,7 @@
                 <a:latin typeface="Consolas" panose="020B0609020204030204" pitchFamily="49" charset="0"/>
                 <a:cs typeface="Consolas" panose="020B0609020204030204" pitchFamily="49" charset="0"/>
               </a:rPr>
-              <a:t>loop  LDRSH r1, [r0], #2 </a:t>
+              <a:t>loop  LDRSH r1, [r0, r2, LSL #1] </a:t>
             </a:r>
           </a:p>
           <a:p>
@@ -12459,7 +12459,7 @@
                 <a:ea typeface="+mn-ea"/>
                 <a:cs typeface="Consolas" panose="020B0609020204030204" pitchFamily="49" charset="0"/>
               </a:rPr>
-              <a:t>PUSH (R1, R3)</a:t>
+              <a:t>PUSH {R1, R3}</a:t>
             </a:r>
           </a:p>
           <a:p>
@@ -12495,7 +12495,7 @@
                 <a:ea typeface="+mn-ea"/>
                 <a:cs typeface="Consolas" panose="020B0609020204030204" pitchFamily="49" charset="0"/>
               </a:rPr>
-              <a:t>POP (R5)</a:t>
+              <a:t>POP {R5}</a:t>
             </a:r>
           </a:p>
         </p:txBody>
@@ -13409,7 +13409,7 @@
           <a:p>
             <a:r>
               <a:rPr lang="en-US" dirty="0"/>
-              <a:t>Register </a:t>
+              <a:t>Register R1:R0</a:t>
             </a:r>
             <a:r>
               <a:rPr lang="en-US" b="1" dirty="0">
@@ -13418,7 +13418,7 @@
                 </a:solidFill>
                 <a:latin typeface="Consolas" panose="020B0609020204030204" pitchFamily="49" charset="0"/>
               </a:rPr>
-              <a:t>R0</a:t>
+              <a:t/>
             </a:r>
           </a:p>
         </p:txBody>
@@ -14292,7 +14292,7 @@
                           <a:latin typeface="Consolas" panose="020B0609020204030204" pitchFamily="49" charset="0"/>
                           <a:cs typeface="Consolas" panose="020B0609020204030204" pitchFamily="49" charset="0"/>
                         </a:rPr>
-                        <a:t>Extern</a:t>
+                        <a:t>extern int32_t</a:t>
                       </a:r>
                       <a:r>
                         <a:rPr lang="fr-FR" sz="1400" dirty="0">
@@ -14300,7 +14300,7 @@
                           <a:latin typeface="Consolas" panose="020B0609020204030204" pitchFamily="49" charset="0"/>
                           <a:cs typeface="Consolas" panose="020B0609020204030204" pitchFamily="49" charset="0"/>
                         </a:rPr>
-                        <a:t> int32_t sum3(int32_t a1, int32_t a2, int32_t a3);</a:t>
+                        <a:t> sum3(int32_t a1, int32_t a2, int32_t a3);</a:t>
                       </a:r>
                     </a:p>
                     <a:p>
@@ -14375,7 +14375,7 @@
                           <a:latin typeface="Consolas" panose="020B0609020204030204" pitchFamily="49" charset="0"/>
                           <a:cs typeface="Consolas" panose="020B0609020204030204" pitchFamily="49" charset="0"/>
                         </a:rPr>
-                        <a:t>int32_t s</a:t>
+                        <a:t>int32_t s;</a:t>
                       </a:r>
                     </a:p>
                     <a:p>
@@ -14976,7 +14976,7 @@
                           <a:ea typeface="+mn-ea"/>
                           <a:cs typeface="+mn-cs"/>
                         </a:rPr>
-                        <a:t>extern</a:t>
+                        <a:t>extern int toLower(int); /* assembler routine */</a:t>
                       </a:r>
                       <a:r>
                         <a:rPr kumimoji="0" lang="en-US" sz="1400" b="0" i="0" kern="1200" dirty="0">
@@ -14988,7 +14988,7 @@
                           <a:ea typeface="+mn-ea"/>
                           <a:cs typeface="+mn-cs"/>
                         </a:rPr>
-                        <a:t> </a:t>
+                        <a:t/>
                       </a:r>
                       <a:r>
                         <a:rPr kumimoji="0" lang="en-US" sz="1400" b="1" i="0" kern="1200" dirty="0">
@@ -15000,7 +15000,7 @@
                           <a:ea typeface="+mn-ea"/>
                           <a:cs typeface="+mn-cs"/>
                         </a:rPr>
-                        <a:t>int</a:t>
+                        <a:t/>
                       </a:r>
                       <a:r>
                         <a:rPr kumimoji="0" lang="en-US" sz="1400" b="0" i="0" kern="1200" dirty="0">
@@ -15012,7 +15012,7 @@
                           <a:ea typeface="+mn-ea"/>
                           <a:cs typeface="+mn-cs"/>
                         </a:rPr>
-                        <a:t> mystery(</a:t>
+                        <a:t/>
                       </a:r>
                       <a:r>
                         <a:rPr kumimoji="0" lang="en-US" sz="1400" b="1" i="0" kern="1200" dirty="0">
@@ -15024,7 +15024,7 @@
                           <a:ea typeface="+mn-ea"/>
                           <a:cs typeface="+mn-cs"/>
                         </a:rPr>
-                        <a:t>int</a:t>
+                        <a:t/>
                       </a:r>
                       <a:r>
                         <a:rPr kumimoji="0" lang="en-US" sz="1400" b="0" i="0" kern="1200" dirty="0">
@@ -15036,7 +15036,7 @@
                           <a:ea typeface="+mn-ea"/>
                           <a:cs typeface="+mn-cs"/>
                         </a:rPr>
-                        <a:t>); </a:t>
+                        <a:t/>
                       </a:r>
                       <a:r>
                         <a:rPr kumimoji="0" lang="en-US" sz="1400" b="0" i="1" kern="1200" dirty="0">
@@ -15048,7 +15048,7 @@
                           <a:ea typeface="+mn-ea"/>
                           <a:cs typeface="+mn-cs"/>
                         </a:rPr>
-                        <a:t>/* mystery assembler routine */</a:t>
+                        <a:t/>
                       </a:r>
                       <a:endParaRPr kumimoji="0" lang="en-US" sz="1400" b="0" i="0" kern="1200" dirty="0">
                         <a:solidFill>
